--- a/project/presentation/COMP447_progress.pptx
+++ b/project/presentation/COMP447_progress.pptx
@@ -3240,7 +3240,7 @@
                 </a:solidFill>
                 <a:latin typeface="Helvetica"/>
               </a:rPr>
-              <a:t>ECT vs Heun under matched latency, and a principled schedule for few step sampling.</a:t>
+              <a:t>When is consistency tuning worth it?  ·  The open question we found.</a:t>
             </a:r>
           </a:p>
         </p:txBody>
